--- a/10-plantas/01-steelmaking/05-capacitacion/MM-CC-03/MM-CC-03_Capacitacion_AMMX.pptx
+++ b/10-plantas/01-steelmaking/05-capacitacion/MM-CC-03/MM-CC-03_Capacitacion_AMMX.pptx
@@ -11267,7 +11267,7 @@
                           <a:ea typeface="Century Gothic" pitchFamily="34" charset="-122"/>
                           <a:cs typeface="Century Gothic" pitchFamily="34" charset="-120"/>
                         </a:rPr>
-                        <a:t>ΔT alto con caudal normal</a:t>
+                        <a:t>ΔT &gt; 11 (CC1) / &gt; 12 °C (CC2)</a:t>
                       </a:r>
                       <a:endParaRPr lang="en-US" sz="1000" dirty="0">
                         <a:latin typeface="Century Gothic" charset="0"/>
@@ -11335,7 +11335,7 @@
                           <a:ea typeface="Century Gothic" pitchFamily="34" charset="-122"/>
                           <a:cs typeface="Century Gothic" pitchFamily="34" charset="-120"/>
                         </a:rPr>
-                        <a:t>Operación reduce velocidad; verificar TT</a:t>
+                        <a:t>Con caudal normal: operación reduce velocidad; verificar TT e incrustación</a:t>
                       </a:r>
                       <a:endParaRPr lang="en-US" sz="1000" dirty="0">
                         <a:latin typeface="Century Gothic" charset="0"/>
@@ -13890,7 +13890,7 @@
                           <a:ea typeface="Century Gothic" pitchFamily="34" charset="-122"/>
                           <a:cs typeface="Century Gothic" pitchFamily="34" charset="-120"/>
                         </a:rPr>
-                        <a:t>24; torre y tanques 12</a:t>
+                        <a:t>24 meses; altura y confinado 12</a:t>
                       </a:r>
                       <a:endParaRPr lang="en-US" sz="950" dirty="0">
                         <a:latin typeface="Century Gothic" charset="0"/>
@@ -14574,7 +14574,7 @@
                           <a:ea typeface="Century Gothic" pitchFamily="34" charset="-122"/>
                           <a:cs typeface="Century Gothic" pitchFamily="34" charset="-120"/>
                         </a:rPr>
-                        <a:t>12 meses</a:t>
+                        <a:t>24 meses</a:t>
                       </a:r>
                       <a:endParaRPr lang="en-US" sz="950" dirty="0">
                         <a:latin typeface="Century Gothic" charset="0"/>
@@ -17576,7 +17576,7 @@
                 <a:ea typeface="Calibri" pitchFamily="34" charset="-122"/>
                 <a:cs typeface="Calibri" pitchFamily="34" charset="-120"/>
               </a:rPr>
-              <a:t>Siguiente paso: OJT supervisado y evaluación práctica (TD-P07); registro en IMaS y DC-3/SIRCE. Validación: pendiente.</a:t>
+              <a:t>Siguiente paso: OJT supervisado y evaluación práctica (TD-P07); registro en IMaS y DC-3/SIRCE. Validación: visto bueno técnica, seguridad, laboral, diseño instruccional.</a:t>
             </a:r>
             <a:endParaRPr lang="en-US" sz="750" dirty="0"/>
           </a:p>
@@ -22654,7 +22654,7 @@
                 <a:ea typeface="Century Gothic" pitchFamily="34" charset="-122"/>
                 <a:cs typeface="Century Gothic" pitchFamily="34" charset="-120"/>
               </a:rPr>
-              <a:t>Diez equipos; ninguna barrera puede quedar fuera</a:t>
+              <a:t>Ningún equipo de las barreras puede quedar fuera</a:t>
             </a:r>
             <a:endParaRPr lang="en-US" sz="2400" dirty="0"/>
           </a:p>
